--- a/decks/hist-slave-trade/hist-slave-trade_ch4_auctions-plantations.pptx
+++ b/decks/hist-slave-trade/hist-slave-trade_ch4_auctions-plantations.pptx
@@ -127,30 +127,30 @@
   <p:extLst>
     <p:ext uri="{521415D9-36F7-43E2-AB2F-B90AF26B5E84}">
       <p14:sectionLst xmlns:p14="http://schemas.microsoft.com/office/powerpoint/2010/main">
-        <p14:section name="Opening" id="{7546ab6d-d9bf-4081-c748-ff9b6612bc96}">
+        <p14:section name="Opening" id="{af199e77-1ea1-dca6-691f-05797381a11b}">
           <p14:sldIdLst>
             <p14:sldId id="256"/>
           </p14:sldIdLst>
         </p14:section>
-        <p14:section name="Gate" id="{d86bc888-522f-26e7-7be3-412aa3c4cfa7}">
+        <p14:section name="Gate" id="{7cb04ba6-b05f-b73e-6b27-61aed0617971}">
           <p14:sldIdLst>
             <p14:sldId id="257"/>
             <p14:sldId id="258"/>
           </p14:sldIdLst>
         </p14:section>
-        <p14:section name="Pre-teach" id="{5cbde768-046d-a8af-9e3a-4b9523b7ce24}">
+        <p14:section name="Pre-teach" id="{09e0421c-3706-7238-c5f6-e85f7a5faa21}">
           <p14:sldIdLst>
             <p14:sldId id="259"/>
             <p14:sldId id="260"/>
           </p14:sldIdLst>
         </p14:section>
-        <p14:section name="Read-along" id="{1ed5e397-02ea-ea3b-6810-3bd5973144cb}">
+        <p14:section name="Read-along" id="{14eab5c5-dc30-c2ec-b540-a7f73bc3dd72}">
           <p14:sldIdLst>
             <p14:sldId id="261"/>
             <p14:sldId id="262"/>
           </p14:sldIdLst>
         </p14:section>
-        <p14:section name="Teach" id="{eb3ca76e-b137-0f05-2409-7eaf8eda0d6c}">
+        <p14:section name="Teach" id="{792a02e8-4c7c-eeca-c9d8-d1143fb72e92}">
           <p14:sldIdLst>
             <p14:sldId id="263"/>
             <p14:sldId id="264"/>
@@ -158,7 +158,7 @@
             <p14:sldId id="266"/>
           </p14:sldIdLst>
         </p14:section>
-        <p14:section name="Routes" id="{3ada7daf-06fe-c692-a02f-9ee5a8796fc6}">
+        <p14:section name="Routes" id="{3525b68e-a29c-6867-5cca-730923f91280}">
           <p14:sldIdLst>
             <p14:sldId id="267"/>
             <p14:sldId id="268"/>
@@ -167,12 +167,12 @@
             <p14:sldId id="271"/>
           </p14:sldIdLst>
         </p14:section>
-        <p14:section name="Close" id="{00aea699-c66b-5f24-1dc3-93a3aeb27180}">
+        <p14:section name="Close" id="{b29f14f2-2ee5-f4d9-3ceb-da4741ca9b19}">
           <p14:sldIdLst>
             <p14:sldId id="272"/>
           </p14:sldIdLst>
         </p14:section>
-        <p14:section name="Answers" id="{c7667170-7e46-7728-4368-e0ecc8a6c5a5}">
+        <p14:section name="Answers" id="{ae580280-d1e2-86be-3156-db0d70bae141}">
           <p14:sldIdLst>
             <p14:sldId id="273"/>
             <p14:sldId id="274"/>
@@ -1331,7 +1331,7 @@
               <a:rPr lang="en-US" dirty="0"/>
               <a:t>Exit ticket — individual, silent, on a slip or mini-whiteboard. Recall before help: no notes, no lanes, no hints. Collect before pupils leave.
 Question: A group of enslaved people on a plantation worked slowly whenever the patroller looked away. Why was an act like this important?
-Answer: A   It let enslaved people keep some control and dignity in a system built to take both away. Small acts of resistance gave people some control over their own labour and kept their identity alive inside a system designed to deny both. That, not an immediate end to slavery, is why they mattered.
+Answer: D   It let enslaved people keep some control and dignity in a system built to take both away. Small acts of resistance gave people some control over their own labour and kept their identity alive inside a system designed to deny both. That, not an immediate end to slavery, is why they mattered.
 Source of this question: module 3 task ("Why small acts mattered") from the manifest.
 Sort the slips: correct → ready to move on; incorrect → start next lesson in the pre-teach group, with the read-along and the Support lane. Same destination next time.</a:t>
             </a:r>
@@ -1610,7 +1610,7 @@
               <a:t>Do now — retrieval. Silent, no notes, no help: recall comes before any support. Give about four minutes.
 1. What was a plantation?  →  A   A very large estate farm growing a crop such as sugar, cotton or tobacco
 2. At an auction, enslaved people were sold to the ___ bidder.  →  highest
-3. Which of these is an example of a small, everyday act of resistance on a plantation?  →  A   Working slowly or breaking a tool on purpose
+3. Which of these is an example of a small, everyday act of resistance on a plantation?  →  C   Working slowly or breaking a tool on purpose
 Circulate: who gets 3/3 (Stretch route), 2/3 (Core), 0–1 (Support)? Use this to route pupils later in the lesson.</a:t>
             </a:r>
             <a:endParaRPr lang="en-US" dirty="0"/>
@@ -1791,7 +1791,7 @@
             <a:r>
               <a:rPr lang="en-US" dirty="0"/>
               <a:t>Answers — exit ticket: Exit ticket. Reveal the answer; pupils mark their own work in a different colour, then read the "why" together. Same destination for every lane, so one answer serves the whole class.
-Answer: A   It let enslaved people keep some control and dignity in a system built to take both away
+Answer: D   It let enslaved people keep some control and dignity in a system built to take both away
 Why: Small acts of resistance gave people some control over their own labour and kept their identity alive inside a system designed to deny both. That, not an immediate end to slavery, is why they mattered.
 Ask a Support pupil to explain one step, and a Stretch pupil to share their extension.</a:t>
             </a:r>
@@ -1884,7 +1884,7 @@
               <a:t>Answers — pupils mark their own in a different colour, then hands up for 3/3, 2/3, 1/3.
 1. A   A very large estate farm growing a crop such as sugar, cotton or tobacco. A plantation was a huge farm estate growing one main crop. Most enslaved people were sent to work on one.
 2. highest. An auction sells to the person who offers the most money: the highest bidder.
-3. A   Working slowly or breaking a tool on purpose. Working slowly and breaking tools were small acts that slowed the plantation down and kept some control for the worker.
+3. C   Working slowly or breaking a tool on purpose. Working slowly and breaking tools were small acts that slowed the plantation down and kept some control for the worker.
 Say the route each score points to: 3/3 Stretch, 2/3 Core, 0–1 Support. Pupils may choose to move up.</a:t>
             </a:r>
             <a:endParaRPr lang="en-US" dirty="0"/>
@@ -10073,7 +10073,7 @@
                 <a:ea typeface="Calibri" pitchFamily="34" charset="-122"/>
                 <a:cs typeface="Calibri" pitchFamily="34" charset="-120"/>
               </a:rPr>
-              <a:t>It let enslaved people keep some control and dignity in a system built to take both away</a:t>
+              <a:t>It made the plantation more profitable for the owner</a:t>
             </a:r>
             <a:endParaRPr lang="en-US" sz="2200" dirty="0"/>
           </a:p>
@@ -10110,7 +10110,7 @@
                 <a:ea typeface="Calibri" pitchFamily="34" charset="-122"/>
                 <a:cs typeface="Calibri" pitchFamily="34" charset="-120"/>
               </a:rPr>
-              <a:t>It ended slavery on that plantation straight away</a:t>
+              <a:t>It was noticed by Parliament in London and led to a new law</a:t>
             </a:r>
             <a:endParaRPr lang="en-US" sz="2200" dirty="0"/>
           </a:p>
@@ -10147,7 +10147,7 @@
                 <a:ea typeface="Calibri" pitchFamily="34" charset="-122"/>
                 <a:cs typeface="Calibri" pitchFamily="34" charset="-120"/>
               </a:rPr>
-              <a:t>It was noticed by Parliament in London and led to a new law</a:t>
+              <a:t>It ended slavery on that plantation straight away</a:t>
             </a:r>
             <a:endParaRPr lang="en-US" sz="2200" dirty="0"/>
           </a:p>
@@ -10184,7 +10184,7 @@
                 <a:ea typeface="Calibri" pitchFamily="34" charset="-122"/>
                 <a:cs typeface="Calibri" pitchFamily="34" charset="-120"/>
               </a:rPr>
-              <a:t>It made the plantation more profitable for the owner</a:t>
+              <a:t>It let enslaved people keep some control and dignity in a system built to take both away</a:t>
             </a:r>
             <a:endParaRPr lang="en-US" sz="2200" dirty="0"/>
           </a:p>
@@ -11650,7 +11650,7 @@
                 <a:ea typeface="Calibri" pitchFamily="34" charset="-122"/>
                 <a:cs typeface="Calibri" pitchFamily="34" charset="-120"/>
               </a:rPr>
-              <a:t>A prison where captives were held before being sold</a:t>
+              <a:t>A ship used on the Middle Passage</a:t>
             </a:r>
             <a:endParaRPr lang="en-US" sz="1800" dirty="0"/>
           </a:p>
@@ -11687,7 +11687,7 @@
                 <a:ea typeface="Calibri" pitchFamily="34" charset="-122"/>
                 <a:cs typeface="Calibri" pitchFamily="34" charset="-120"/>
               </a:rPr>
-              <a:t>A ship used on the Middle Passage</a:t>
+              <a:t>A prison where captives were held before being sold</a:t>
             </a:r>
             <a:endParaRPr lang="en-US" sz="1800" dirty="0"/>
           </a:p>
@@ -12089,7 +12089,7 @@
                 <a:ea typeface="Calibri" pitchFamily="34" charset="-122"/>
                 <a:cs typeface="Calibri" pitchFamily="34" charset="-120"/>
               </a:rPr>
-              <a:t>Working slowly or breaking a tool on purpose</a:t>
+              <a:t>Buying a plantation of your own</a:t>
             </a:r>
             <a:endParaRPr lang="en-US" sz="1800" dirty="0"/>
           </a:p>
@@ -12163,7 +12163,7 @@
                 <a:ea typeface="Calibri" pitchFamily="34" charset="-122"/>
                 <a:cs typeface="Calibri" pitchFamily="34" charset="-120"/>
               </a:rPr>
-              <a:t>Agreeing to work extra hours</a:t>
+              <a:t>Working slowly or breaking a tool on purpose</a:t>
             </a:r>
             <a:endParaRPr lang="en-US" sz="1800" dirty="0"/>
           </a:p>
@@ -12200,7 +12200,7 @@
                 <a:ea typeface="Calibri" pitchFamily="34" charset="-122"/>
                 <a:cs typeface="Calibri" pitchFamily="34" charset="-120"/>
               </a:rPr>
-              <a:t>Buying a plantation of your own</a:t>
+              <a:t>Agreeing to work extra hours</a:t>
             </a:r>
             <a:endParaRPr lang="en-US" sz="1800" dirty="0"/>
           </a:p>
@@ -13146,7 +13146,7 @@
                 <a:ea typeface="Cambria" pitchFamily="34" charset="-122"/>
                 <a:cs typeface="Cambria" pitchFamily="34" charset="-120"/>
               </a:rPr>
-              <a:t>A   It let enslaved people keep some control and dignity in a system built to take both away</a:t>
+              <a:t>D   It let enslaved people keep some control and dignity in a system built to take both away</a:t>
             </a:r>
             <a:endParaRPr lang="en-US" sz="1800" dirty="0"/>
           </a:p>
@@ -14167,7 +14167,7 @@
                 <a:ea typeface="Calibri" pitchFamily="34" charset="-122"/>
                 <a:cs typeface="Calibri" pitchFamily="34" charset="-120"/>
               </a:rPr>
-              <a:t>A   Working slowly or breaking a tool on purpose</a:t>
+              <a:t>C   Working slowly or breaking a tool on purpose</a:t>
             </a:r>
             <a:endParaRPr lang="en-US" sz="2200" dirty="0"/>
           </a:p>

--- a/decks/hist-slave-trade/hist-slave-trade_ch4_auctions-plantations.pptx
+++ b/decks/hist-slave-trade/hist-slave-trade_ch4_auctions-plantations.pptx
@@ -127,30 +127,30 @@
   <p:extLst>
     <p:ext uri="{521415D9-36F7-43E2-AB2F-B90AF26B5E84}">
       <p14:sectionLst xmlns:p14="http://schemas.microsoft.com/office/powerpoint/2010/main">
-        <p14:section name="Opening" id="{af199e77-1ea1-dca6-691f-05797381a11b}">
+        <p14:section name="Opening" id="{fa6efcb2-5ae5-1cba-7cdc-54cde21cc44d}">
           <p14:sldIdLst>
             <p14:sldId id="256"/>
           </p14:sldIdLst>
         </p14:section>
-        <p14:section name="Gate" id="{7cb04ba6-b05f-b73e-6b27-61aed0617971}">
+        <p14:section name="Gate" id="{4410ced2-8713-cf62-944a-9ecca398377b}">
           <p14:sldIdLst>
             <p14:sldId id="257"/>
             <p14:sldId id="258"/>
           </p14:sldIdLst>
         </p14:section>
-        <p14:section name="Pre-teach" id="{09e0421c-3706-7238-c5f6-e85f7a5faa21}">
+        <p14:section name="Pre-teach" id="{d596f5a3-4730-710f-3d89-72b5c08a9413}">
           <p14:sldIdLst>
             <p14:sldId id="259"/>
             <p14:sldId id="260"/>
           </p14:sldIdLst>
         </p14:section>
-        <p14:section name="Read-along" id="{14eab5c5-dc30-c2ec-b540-a7f73bc3dd72}">
+        <p14:section name="Read-along" id="{3d31fe6c-7ec8-41a8-3207-515933b61677}">
           <p14:sldIdLst>
             <p14:sldId id="261"/>
             <p14:sldId id="262"/>
           </p14:sldIdLst>
         </p14:section>
-        <p14:section name="Teach" id="{792a02e8-4c7c-eeca-c9d8-d1143fb72e92}">
+        <p14:section name="Teach" id="{9c9e4d46-68c2-f3de-52ff-e3f2f1880e25}">
           <p14:sldIdLst>
             <p14:sldId id="263"/>
             <p14:sldId id="264"/>
@@ -158,7 +158,7 @@
             <p14:sldId id="266"/>
           </p14:sldIdLst>
         </p14:section>
-        <p14:section name="Routes" id="{3525b68e-a29c-6867-5cca-730923f91280}">
+        <p14:section name="Routes" id="{a43e6b6f-a67b-e9b7-b205-9c0441dbf7eb}">
           <p14:sldIdLst>
             <p14:sldId id="267"/>
             <p14:sldId id="268"/>
@@ -167,12 +167,12 @@
             <p14:sldId id="271"/>
           </p14:sldIdLst>
         </p14:section>
-        <p14:section name="Close" id="{b29f14f2-2ee5-f4d9-3ceb-da4741ca9b19}">
+        <p14:section name="Close" id="{c5696187-5422-0772-4966-472ef7785eba}">
           <p14:sldIdLst>
             <p14:sldId id="272"/>
           </p14:sldIdLst>
         </p14:section>
-        <p14:section name="Answers" id="{ae580280-d1e2-86be-3156-db0d70bae141}">
+        <p14:section name="Answers" id="{12606499-6703-2638-c3fb-341b14b6820f}">
           <p14:sldIdLst>
             <p14:sldId id="273"/>
             <p14:sldId id="274"/>
